--- a/public/fun/pack/pptx/reviewpro/보장점검양식프리미엄_27_부부점검_코퍼차콜.pptx
+++ b/public/fun/pack/pptx/reviewpro/보장점검양식프리미엄_27_부부점검_코퍼차콜.pptx
@@ -112,12 +112,12 @@
   <p:extLst>
     <p:ext uri="{521415D9-36F7-43E2-AB2F-B90AF26B5E84}">
       <p14:sectionLst xmlns:p14="http://schemas.microsoft.com/office/powerpoint/2010/main">
-        <p14:section name="시작" id="{6BDBA7EF-99FC-4B77-8157-F0E6BA104EF0}">
+        <p14:section name="시작" id="{4DB4EF21-AE74-4C42-9633-D1DBA59F6BA2}">
           <p14:sldIdLst>
             <p14:sldId id="256"/>
           </p14:sldIdLst>
         </p14:section>
-        <p14:section name="본문" id="{54075938-0334-466E-A1C5-238908FCADBE}">
+        <p14:section name="본문" id="{05190053-1AEF-4BD3-9530-96CB5D49D221}">
           <p14:sldIdLst>
             <p14:sldId id="257"/>
             <p14:sldId id="258"/>
@@ -1563,7 +1563,7 @@
             </a:lvl1pPr>
           </a:lstStyle>
           <a:p>
-            <a:fld id="{A8667FAD-9F60-4E33-9DFA-61022691F554}" type="slidenum">
+            <a:fld id="{ED0EFD65-0625-4C1E-9EEA-2D013FD5CD7D}" type="slidenum">
               <a:rPr lang="en-US"/>
               <a:t>‹#›</a:t>
             </a:fld>
@@ -2190,7 +2190,7 @@
             </a:lvl1pPr>
           </a:lstStyle>
           <a:p>
-            <a:fld id="{101EDD6F-B798-4B8B-B90F-13625EED1CFE}" type="slidenum">
+            <a:fld id="{1B9EAAEA-5B1C-49FB-B78A-73E9D306426F}" type="slidenum">
               <a:rPr lang="en-US"/>
               <a:t>‹#›</a:t>
             </a:fld>
@@ -2811,7 +2811,7 @@
             </a:lvl1pPr>
           </a:lstStyle>
           <a:p>
-            <a:fld id="{F482E136-ADC8-4474-B2E2-1360AF247019}" type="slidenum">
+            <a:fld id="{38847189-E367-4CAB-9184-CADD5E093EC5}" type="slidenum">
               <a:rPr lang="en-US"/>
               <a:t>‹#›</a:t>
             </a:fld>
@@ -3664,7 +3664,7 @@
           <a:p>
             <a:r>
               <a:rPr lang="ko-KR"/>
-              <a:t>부부 점검 · 0000. 00. 00</a:t>
+              <a:t>부부 점검 · 날짜 입력</a:t>
             </a:r>
           </a:p>
           <a:p>
@@ -3755,7 +3755,7 @@
           <a:bodyPr/>
           <a:lstStyle/>
           <a:p>
-            <a:fld id="{8C973DD5-150C-4EB5-962C-7F09096C092D}" type="slidenum">
+            <a:fld id="{0A09C1FD-5D57-4A25-BE44-001DC7D18B8C}" type="slidenum">
               <a:rPr lang="en-US"/>
               <a:t>‹#›</a:t>
             </a:fld>
@@ -4468,7 +4468,7 @@
           <a:bodyPr/>
           <a:lstStyle/>
           <a:p>
-            <a:fld id="{756EB53B-C120-45ED-8511-87026BD9ECCE}" type="slidenum">
+            <a:fld id="{5F6C0E0B-B2EC-4BD7-A84D-3505BE1BA530}" type="slidenum">
               <a:rPr lang="en-US"/>
               <a:t>‹#›</a:t>
             </a:fld>
@@ -5974,7 +5974,7 @@
           <a:bodyPr/>
           <a:lstStyle/>
           <a:p>
-            <a:fld id="{41D10E2B-69AA-43BD-85F1-758FE917C5AC}" type="slidenum">
+            <a:fld id="{29AE0896-A199-4AE6-BC28-C55E68148260}" type="slidenum">
               <a:rPr lang="en-US"/>
               <a:t>‹#›</a:t>
             </a:fld>
@@ -7524,7 +7524,7 @@
           <a:bodyPr/>
           <a:lstStyle/>
           <a:p>
-            <a:fld id="{A1953418-F3E4-4CC7-9C40-1BB4DB2A2FF7}" type="slidenum">
+            <a:fld id="{3493473A-C737-4C22-B9FF-4B94731D1F3F}" type="slidenum">
               <a:rPr lang="en-US"/>
               <a:t>‹#›</a:t>
             </a:fld>
@@ -8461,7 +8461,7 @@
           <a:bodyPr/>
           <a:lstStyle/>
           <a:p>
-            <a:fld id="{BE78BC96-F3A7-4F28-9A58-DC4E2B62F6E8}" type="slidenum">
+            <a:fld id="{786D9133-A1B9-4FEB-946F-75E63E39A839}" type="slidenum">
               <a:rPr lang="en-US"/>
               <a:t>‹#›</a:t>
             </a:fld>
